--- a/product/案件/愛され手相カウンセラー/スライド/リード用セミナー_60分_スライド.pptx
+++ b/product/案件/愛され手相カウンセラー/スライド/リード用セミナー_60分_スライド.pptx
@@ -3189,7 +3189,7 @@
               </a:defRPr>
             </a:pPr>
             <a:r>
-              <a:t>やさしく売れる手相入門セミナー（60分）</a:t>
+              <a:t>愛され手相カウンセラー 入門セミナー（60分）</a:t>
             </a:r>
           </a:p>
           <a:p>
